--- a/docs/PPT/Agent评测_v6.pptx
+++ b/docs/PPT/Agent评测_v6.pptx
@@ -5,25 +5,25 @@
     <p:sldMasterId id="2147483648" r:id="rId1"/>
   </p:sldMasterIdLst>
   <p:notesMasterIdLst>
-    <p:notesMasterId r:id="rId21"/>
+    <p:notesMasterId r:id="rId16"/>
   </p:notesMasterIdLst>
   <p:sldIdLst>
-    <p:sldId id="256" r:id="rId7"/>
-    <p:sldId id="257" r:id="rId8"/>
-    <p:sldId id="258" r:id="rId9"/>
-    <p:sldId id="259" r:id="rId10"/>
-    <p:sldId id="260" r:id="rId11"/>
-    <p:sldId id="261" r:id="rId12"/>
-    <p:sldId id="262" r:id="rId13"/>
-    <p:sldId id="263" r:id="rId14"/>
-    <p:sldId id="264" r:id="rId15"/>
-    <p:sldId id="265" r:id="rId16"/>
-    <p:sldId id="266" r:id="rId17"/>
-    <p:sldId id="267" r:id="rId18"/>
-    <p:sldId id="268" r:id="rId19"/>
-    <p:sldId id="269" r:id="rId20"/>
+    <p:sldId id="256" r:id="rId2"/>
+    <p:sldId id="257" r:id="rId3"/>
+    <p:sldId id="258" r:id="rId4"/>
+    <p:sldId id="259" r:id="rId5"/>
+    <p:sldId id="260" r:id="rId6"/>
+    <p:sldId id="261" r:id="rId7"/>
+    <p:sldId id="262" r:id="rId8"/>
+    <p:sldId id="263" r:id="rId9"/>
+    <p:sldId id="264" r:id="rId10"/>
+    <p:sldId id="265" r:id="rId11"/>
+    <p:sldId id="266" r:id="rId12"/>
+    <p:sldId id="267" r:id="rId13"/>
+    <p:sldId id="268" r:id="rId14"/>
+    <p:sldId id="269" r:id="rId15"/>
   </p:sldIdLst>
-  <p:sldSz cx="12192000" cy="6858000" type="screen4x3"/>
+  <p:sldSz cx="12192000" cy="6858000"/>
   <p:notesSz cx="6858000" cy="9144000"/>
   <p:defaultTextStyle>
     <a:defPPr>
@@ -120,12 +120,33 @@
       </a:defRPr>
     </a:lvl9pPr>
   </p:defaultTextStyle>
+  <p:extLst>
+    <p:ext uri="{EFAFB233-063F-42B5-8137-9DF3F51BA10A}">
+      <p15:sldGuideLst xmlns:p15="http://schemas.microsoft.com/office/powerpoint/2012/main">
+        <p15:guide id="1" orient="horz" pos="2160">
+          <p15:clr>
+            <a:srgbClr val="A4A3A4"/>
+          </p15:clr>
+        </p15:guide>
+        <p15:guide id="2" pos="2880">
+          <p15:clr>
+            <a:srgbClr val="A4A3A4"/>
+          </p15:clr>
+        </p15:guide>
+      </p15:sldGuideLst>
+    </p:ext>
+  </p:extLst>
 </p:presentation>
 </file>
 
 <file path=ppt/notesMasters/notesMaster1.xml><?xml version="1.0" encoding="utf-8"?>
 <p:notesMaster xmlns:a="http://schemas.openxmlformats.org/drawingml/2006/main" xmlns:r="http://schemas.openxmlformats.org/officeDocument/2006/relationships" xmlns:p="http://schemas.openxmlformats.org/presentationml/2006/main">
   <p:cSld>
+    <p:bg>
+      <p:bgRef idx="1001">
+        <a:schemeClr val="bg1"/>
+      </p:bgRef>
+    </p:bg>
     <p:spTree>
       <p:nvGrpSpPr>
         <p:cNvPr id="1" name=""/>
@@ -301,7 +322,7 @@
   <p:hf/>
   <p:notesStyle>
     <a:lvl1pPr marL="0" algn="l">
-      <a:defRPr sz="1200" lang="en-US"/>
+      <a:defRPr lang="en-US" sz="1200"/>
     </a:lvl1pPr>
   </p:notesStyle>
 </p:notesMaster>
@@ -2036,8 +2057,8 @@
 </p:notes>
 </file>
 
-<file path=ppt/slideLayouts/slideLayout7.xml><?xml version="1.0" encoding="utf-8"?>
-<p:sldLayout xmlns:a="http://schemas.openxmlformats.org/drawingml/2006/main" xmlns:p="http://schemas.openxmlformats.org/presentationml/2006/main" type="blank" preserve="1">
+<file path=ppt/slideLayouts/slideLayout1.xml><?xml version="1.0" encoding="utf-8"?>
+<p:sldLayout xmlns:a="http://schemas.openxmlformats.org/drawingml/2006/main" xmlns:r="http://schemas.openxmlformats.org/officeDocument/2006/relationships" xmlns:p="http://schemas.openxmlformats.org/presentationml/2006/main" type="blank" preserve="1">
   <p:cSld name="pawbench_agent_eval_v6 — Blank">
     <p:spTree>
       <p:nvGrpSpPr>
@@ -2070,7 +2091,7 @@
           <a:p>
             <a:fld id="{5BCAD085-E8A6-8845-BD4E-CB4CCA059FC4}" type="datetimeFigureOut">
               <a:rPr lang="en-US" smtClean="0"/>
-              <a:t>1/27/13</a:t>
+              <a:t>8/6/2026</a:t>
             </a:fld>
             <a:endParaRPr lang="en-US"/>
           </a:p>
@@ -2127,7 +2148,7 @@
 </file>
 
 <file path=ppt/slideMasters/slideMaster1.xml><?xml version="1.0" encoding="utf-8"?>
-<p:sldMaster xmlns:a="http://schemas.openxmlformats.org/drawingml/2006/main" xmlns:p="http://schemas.openxmlformats.org/presentationml/2006/main" xmlns:r="http://schemas.openxmlformats.org/officeDocument/2006/relationships">
+<p:sldMaster xmlns:a="http://schemas.openxmlformats.org/drawingml/2006/main" xmlns:r="http://schemas.openxmlformats.org/officeDocument/2006/relationships" xmlns:p="http://schemas.openxmlformats.org/presentationml/2006/main">
   <p:cSld name="pawbench_agent_eval_v6 — Master">
     <p:bg>
       <p:bgRef idx="1001">
@@ -2183,7 +2204,7 @@
           <a:p>
             <a:fld id="{5BCAD085-E8A6-8845-BD4E-CB4CCA059FC4}" type="datetimeFigureOut">
               <a:rPr lang="en-US" smtClean="0"/>
-              <a:t>1/27/13</a:t>
+              <a:t>8/6/2026</a:t>
             </a:fld>
             <a:endParaRPr lang="en-US"/>
           </a:p>
@@ -2271,7 +2292,7 @@
   </p:cSld>
   <p:clrMap bg1="lt1" tx1="dk1" bg2="lt2" tx2="dk2" accent1="accent1" accent2="accent2" accent3="accent3" accent4="accent4" accent5="accent5" accent6="accent6" hlink="hlink" folHlink="folHlink"/>
   <p:sldLayoutIdLst>
-    <p:sldLayoutId id="2147483655" r:id="rId7"/>
+    <p:sldLayoutId id="2147483655" r:id="rId1"/>
   </p:sldLayoutIdLst>
   <p:txStyles>
     <p:titleStyle>
@@ -2990,9 +3011,18 @@
   <p:clrMapOvr>
     <a:masterClrMapping/>
   </p:clrMapOvr>
-  <p:transition xmlns:p14="http://schemas.microsoft.com/office/powerpoint/2010/main" p14:dur="400">
-    <p:fade/>
-  </p:transition>
+  <mc:AlternateContent xmlns:mc="http://schemas.openxmlformats.org/markup-compatibility/2006">
+    <mc:Choice xmlns:p14="http://schemas.microsoft.com/office/powerpoint/2010/main" Requires="p14">
+      <p:transition p14:dur="400">
+        <p:fade/>
+      </p:transition>
+    </mc:Choice>
+    <mc:Fallback>
+      <p:transition>
+        <p:fade/>
+      </p:transition>
+    </mc:Fallback>
+  </mc:AlternateContent>
 </p:sld>
 </file>
 
@@ -3574,7 +3604,7 @@
             </a:bodyPr>
             <a:lstStyle/>
             <a:p>
-              <a:pPr algn="l" marL="129540" indent="-129540">
+              <a:pPr marL="129540" indent="-129540" algn="l">
                 <a:buClr>
                   <a:schemeClr val="dk2"/>
                 </a:buClr>
@@ -3621,7 +3651,7 @@
             </a:bodyPr>
             <a:lstStyle/>
             <a:p>
-              <a:pPr algn="l" marL="129540" indent="-129540">
+              <a:pPr marL="129540" indent="-129540" algn="l">
                 <a:buClr>
                   <a:schemeClr val="dk2"/>
                 </a:buClr>
@@ -3668,7 +3698,7 @@
             </a:bodyPr>
             <a:lstStyle/>
             <a:p>
-              <a:pPr algn="l" marL="129540" indent="-129540">
+              <a:pPr marL="129540" indent="-129540" algn="l">
                 <a:buClr>
                   <a:schemeClr val="dk2"/>
                 </a:buClr>
@@ -3715,7 +3745,7 @@
             </a:bodyPr>
             <a:lstStyle/>
             <a:p>
-              <a:pPr algn="l" marL="129540" indent="-129540">
+              <a:pPr marL="129540" indent="-129540" algn="l">
                 <a:buClr>
                   <a:schemeClr val="dk2"/>
                 </a:buClr>
@@ -3901,7 +3931,7 @@
             </a:bodyPr>
             <a:lstStyle/>
             <a:p>
-              <a:pPr algn="l" marL="129540" indent="-129540">
+              <a:pPr marL="129540" indent="-129540" algn="l">
                 <a:buClr>
                   <a:schemeClr val="dk2"/>
                 </a:buClr>
@@ -3988,7 +4018,7 @@
             </a:bodyPr>
             <a:lstStyle/>
             <a:p>
-              <a:pPr algn="l" marL="129540" indent="-129540">
+              <a:pPr marL="129540" indent="-129540" algn="l">
                 <a:buClr>
                   <a:schemeClr val="dk2"/>
                 </a:buClr>
@@ -4035,7 +4065,7 @@
             </a:bodyPr>
             <a:lstStyle/>
             <a:p>
-              <a:pPr algn="l" marL="129540" indent="-129540">
+              <a:pPr marL="129540" indent="-129540" algn="l">
                 <a:buClr>
                   <a:schemeClr val="dk2"/>
                 </a:buClr>
@@ -4221,7 +4251,7 @@
             </a:bodyPr>
             <a:lstStyle/>
             <a:p>
-              <a:pPr algn="l" marL="129540" indent="-129540">
+              <a:pPr marL="129540" indent="-129540" algn="l">
                 <a:buClr>
                   <a:schemeClr val="dk2"/>
                 </a:buClr>
@@ -4268,7 +4298,7 @@
             </a:bodyPr>
             <a:lstStyle/>
             <a:p>
-              <a:pPr algn="l" marL="129540" indent="-129540">
+              <a:pPr marL="129540" indent="-129540" algn="l">
                 <a:buClr>
                   <a:schemeClr val="dk2"/>
                 </a:buClr>
@@ -4315,7 +4345,7 @@
             </a:bodyPr>
             <a:lstStyle/>
             <a:p>
-              <a:pPr algn="l" marL="129540" indent="-129540">
+              <a:pPr marL="129540" indent="-129540" algn="l">
                 <a:buClr>
                   <a:schemeClr val="dk2"/>
                 </a:buClr>
@@ -4362,7 +4392,7 @@
             </a:bodyPr>
             <a:lstStyle/>
             <a:p>
-              <a:pPr algn="l" marL="129540" indent="-129540">
+              <a:pPr marL="129540" indent="-129540" algn="l">
                 <a:buClr>
                   <a:schemeClr val="dk2"/>
                 </a:buClr>
@@ -4449,7 +4479,7 @@
             </a:bodyPr>
             <a:lstStyle/>
             <a:p>
-              <a:pPr algn="l" marL="129540" indent="-129540">
+              <a:pPr marL="129540" indent="-129540" algn="l">
                 <a:buClr>
                   <a:schemeClr val="dk2"/>
                 </a:buClr>
@@ -4737,7 +4767,7 @@
             </a:bodyPr>
             <a:lstStyle/>
             <a:p>
-              <a:pPr algn="l" marL="129540" indent="-129540">
+              <a:pPr marL="129540" indent="-129540" algn="l">
                 <a:buClr>
                   <a:schemeClr val="dk2"/>
                 </a:buClr>
@@ -4784,7 +4814,7 @@
             </a:bodyPr>
             <a:lstStyle/>
             <a:p>
-              <a:pPr algn="l" marL="129540" indent="-129540">
+              <a:pPr marL="129540" indent="-129540" algn="l">
                 <a:buClr>
                   <a:schemeClr val="dk2"/>
                 </a:buClr>
@@ -5011,9 +5041,18 @@
   <p:clrMapOvr>
     <a:masterClrMapping/>
   </p:clrMapOvr>
-  <p:transition xmlns:p14="http://schemas.microsoft.com/office/powerpoint/2010/main" p14:dur="400">
-    <p:fade/>
-  </p:transition>
+  <mc:AlternateContent xmlns:mc="http://schemas.openxmlformats.org/markup-compatibility/2006">
+    <mc:Choice xmlns:p14="http://schemas.microsoft.com/office/powerpoint/2010/main" Requires="p14">
+      <p:transition p14:dur="400">
+        <p:fade/>
+      </p:transition>
+    </mc:Choice>
+    <mc:Fallback>
+      <p:transition>
+        <p:fade/>
+      </p:transition>
+    </mc:Fallback>
+  </mc:AlternateContent>
 </p:sld>
 </file>
 
@@ -6888,9 +6927,18 @@
   <p:clrMapOvr>
     <a:masterClrMapping/>
   </p:clrMapOvr>
-  <p:transition xmlns:p14="http://schemas.microsoft.com/office/powerpoint/2010/main" p14:dur="400">
-    <p:fade/>
-  </p:transition>
+  <mc:AlternateContent xmlns:mc="http://schemas.openxmlformats.org/markup-compatibility/2006">
+    <mc:Choice xmlns:p14="http://schemas.microsoft.com/office/powerpoint/2010/main" Requires="p14">
+      <p:transition p14:dur="400">
+        <p:fade/>
+      </p:transition>
+    </mc:Choice>
+    <mc:Fallback>
+      <p:transition>
+        <p:fade/>
+      </p:transition>
+    </mc:Fallback>
+  </mc:AlternateContent>
 </p:sld>
 </file>
 
@@ -9115,7 +9163,7 @@
             </a:bodyPr>
             <a:lstStyle/>
             <a:p>
-              <a:pPr algn="l" marL="129540" indent="-129540">
+              <a:pPr marL="129540" indent="-129540" algn="l">
                 <a:buClr>
                   <a:schemeClr val="dk2"/>
                 </a:buClr>
@@ -9162,7 +9210,7 @@
             </a:bodyPr>
             <a:lstStyle/>
             <a:p>
-              <a:pPr algn="l" marL="129540" indent="-129540">
+              <a:pPr marL="129540" indent="-129540" algn="l">
                 <a:buClr>
                   <a:schemeClr val="dk2"/>
                 </a:buClr>
@@ -9209,7 +9257,7 @@
             </a:bodyPr>
             <a:lstStyle/>
             <a:p>
-              <a:pPr algn="l" marL="129540" indent="-129540">
+              <a:pPr marL="129540" indent="-129540" algn="l">
                 <a:buClr>
                   <a:schemeClr val="dk2"/>
                 </a:buClr>
@@ -9277,9 +9325,18 @@
   <p:clrMapOvr>
     <a:masterClrMapping/>
   </p:clrMapOvr>
-  <p:transition xmlns:p14="http://schemas.microsoft.com/office/powerpoint/2010/main" p14:dur="400">
-    <p:fade/>
-  </p:transition>
+  <mc:AlternateContent xmlns:mc="http://schemas.openxmlformats.org/markup-compatibility/2006">
+    <mc:Choice xmlns:p14="http://schemas.microsoft.com/office/powerpoint/2010/main" Requires="p14">
+      <p:transition p14:dur="400">
+        <p:fade/>
+      </p:transition>
+    </mc:Choice>
+    <mc:Fallback>
+      <p:transition>
+        <p:fade/>
+      </p:transition>
+    </mc:Fallback>
+  </mc:AlternateContent>
 </p:sld>
 </file>
 
@@ -10996,9 +11053,18 @@
   <p:clrMapOvr>
     <a:masterClrMapping/>
   </p:clrMapOvr>
-  <p:transition xmlns:p14="http://schemas.microsoft.com/office/powerpoint/2010/main" p14:dur="400">
-    <p:fade/>
-  </p:transition>
+  <mc:AlternateContent xmlns:mc="http://schemas.openxmlformats.org/markup-compatibility/2006">
+    <mc:Choice xmlns:p14="http://schemas.microsoft.com/office/powerpoint/2010/main" Requires="p14">
+      <p:transition p14:dur="400">
+        <p:fade/>
+      </p:transition>
+    </mc:Choice>
+    <mc:Fallback>
+      <p:transition>
+        <p:fade/>
+      </p:transition>
+    </mc:Fallback>
+  </mc:AlternateContent>
 </p:sld>
 </file>
 
@@ -12205,9 +12271,18 @@
   <p:clrMapOvr>
     <a:masterClrMapping/>
   </p:clrMapOvr>
-  <p:transition xmlns:p14="http://schemas.microsoft.com/office/powerpoint/2010/main" p14:dur="400">
-    <p:fade/>
-  </p:transition>
+  <mc:AlternateContent xmlns:mc="http://schemas.openxmlformats.org/markup-compatibility/2006">
+    <mc:Choice xmlns:p14="http://schemas.microsoft.com/office/powerpoint/2010/main" Requires="p14">
+      <p:transition p14:dur="400">
+        <p:fade/>
+      </p:transition>
+    </mc:Choice>
+    <mc:Fallback>
+      <p:transition>
+        <p:fade/>
+      </p:transition>
+    </mc:Fallback>
+  </mc:AlternateContent>
 </p:sld>
 </file>
 
@@ -13535,9 +13610,18 @@
   <p:clrMapOvr>
     <a:masterClrMapping/>
   </p:clrMapOvr>
-  <p:transition xmlns:p14="http://schemas.microsoft.com/office/powerpoint/2010/main" p14:dur="400">
-    <p:fade/>
-  </p:transition>
+  <mc:AlternateContent xmlns:mc="http://schemas.openxmlformats.org/markup-compatibility/2006">
+    <mc:Choice xmlns:p14="http://schemas.microsoft.com/office/powerpoint/2010/main" Requires="p14">
+      <p:transition p14:dur="400">
+        <p:fade/>
+      </p:transition>
+    </mc:Choice>
+    <mc:Fallback>
+      <p:transition>
+        <p:fade/>
+      </p:transition>
+    </mc:Fallback>
+  </mc:AlternateContent>
 </p:sld>
 </file>
 
@@ -15563,9 +15647,18 @@
   <p:clrMapOvr>
     <a:masterClrMapping/>
   </p:clrMapOvr>
-  <p:transition xmlns:p14="http://schemas.microsoft.com/office/powerpoint/2010/main" p14:dur="400">
-    <p:fade/>
-  </p:transition>
+  <mc:AlternateContent xmlns:mc="http://schemas.openxmlformats.org/markup-compatibility/2006">
+    <mc:Choice xmlns:p14="http://schemas.microsoft.com/office/powerpoint/2010/main" Requires="p14">
+      <p:transition p14:dur="400">
+        <p:fade/>
+      </p:transition>
+    </mc:Choice>
+    <mc:Fallback>
+      <p:transition>
+        <p:fade/>
+      </p:transition>
+    </mc:Fallback>
+  </mc:AlternateContent>
 </p:sld>
 </file>
 
@@ -18909,9 +19002,18 @@
   <p:clrMapOvr>
     <a:masterClrMapping/>
   </p:clrMapOvr>
-  <p:transition xmlns:p14="http://schemas.microsoft.com/office/powerpoint/2010/main" p14:dur="400">
-    <p:fade/>
-  </p:transition>
+  <mc:AlternateContent xmlns:mc="http://schemas.openxmlformats.org/markup-compatibility/2006">
+    <mc:Choice xmlns:p14="http://schemas.microsoft.com/office/powerpoint/2010/main" Requires="p14">
+      <p:transition p14:dur="400">
+        <p:fade/>
+      </p:transition>
+    </mc:Choice>
+    <mc:Fallback>
+      <p:transition>
+        <p:fade/>
+      </p:transition>
+    </mc:Fallback>
+  </mc:AlternateContent>
 </p:sld>
 </file>
 
@@ -20375,9 +20477,18 @@
   <p:clrMapOvr>
     <a:masterClrMapping/>
   </p:clrMapOvr>
-  <p:transition xmlns:p14="http://schemas.microsoft.com/office/powerpoint/2010/main" p14:dur="400">
-    <p:fade/>
-  </p:transition>
+  <mc:AlternateContent xmlns:mc="http://schemas.openxmlformats.org/markup-compatibility/2006">
+    <mc:Choice xmlns:p14="http://schemas.microsoft.com/office/powerpoint/2010/main" Requires="p14">
+      <p:transition p14:dur="400">
+        <p:fade/>
+      </p:transition>
+    </mc:Choice>
+    <mc:Fallback>
+      <p:transition>
+        <p:fade/>
+      </p:transition>
+    </mc:Fallback>
+  </mc:AlternateContent>
 </p:sld>
 </file>
 
@@ -22215,9 +22326,18 @@
   <p:clrMapOvr>
     <a:masterClrMapping/>
   </p:clrMapOvr>
-  <p:transition xmlns:p14="http://schemas.microsoft.com/office/powerpoint/2010/main" p14:dur="400">
-    <p:fade/>
-  </p:transition>
+  <mc:AlternateContent xmlns:mc="http://schemas.openxmlformats.org/markup-compatibility/2006">
+    <mc:Choice xmlns:p14="http://schemas.microsoft.com/office/powerpoint/2010/main" Requires="p14">
+      <p:transition p14:dur="400">
+        <p:fade/>
+      </p:transition>
+    </mc:Choice>
+    <mc:Fallback>
+      <p:transition>
+        <p:fade/>
+      </p:transition>
+    </mc:Fallback>
+  </mc:AlternateContent>
 </p:sld>
 </file>
 
@@ -24186,9 +24306,18 @@
   <p:clrMapOvr>
     <a:masterClrMapping/>
   </p:clrMapOvr>
-  <p:transition xmlns:p14="http://schemas.microsoft.com/office/powerpoint/2010/main" p14:dur="400">
-    <p:fade/>
-  </p:transition>
+  <mc:AlternateContent xmlns:mc="http://schemas.openxmlformats.org/markup-compatibility/2006">
+    <mc:Choice xmlns:p14="http://schemas.microsoft.com/office/powerpoint/2010/main" Requires="p14">
+      <p:transition p14:dur="400">
+        <p:fade/>
+      </p:transition>
+    </mc:Choice>
+    <mc:Fallback>
+      <p:transition>
+        <p:fade/>
+      </p:transition>
+    </mc:Fallback>
+  </mc:AlternateContent>
 </p:sld>
 </file>
 
@@ -24473,7 +24602,7 @@
             <p:nvPr/>
           </p:nvPicPr>
           <p:blipFill>
-            <a:blip r:embed="rId2"/>
+            <a:blip r:embed="rId3"/>
             <a:stretch>
               <a:fillRect/>
             </a:stretch>
@@ -24589,9 +24718,18 @@
   <p:clrMapOvr>
     <a:masterClrMapping/>
   </p:clrMapOvr>
-  <p:transition xmlns:p14="http://schemas.microsoft.com/office/powerpoint/2010/main" p14:dur="400">
-    <p:fade/>
-  </p:transition>
+  <mc:AlternateContent xmlns:mc="http://schemas.openxmlformats.org/markup-compatibility/2006">
+    <mc:Choice xmlns:p14="http://schemas.microsoft.com/office/powerpoint/2010/main" Requires="p14">
+      <p:transition p14:dur="400">
+        <p:fade/>
+      </p:transition>
+    </mc:Choice>
+    <mc:Fallback>
+      <p:transition>
+        <p:fade/>
+      </p:transition>
+    </mc:Fallback>
+  </mc:AlternateContent>
 </p:sld>
 </file>
 
@@ -27147,9 +27285,18 @@
   <p:clrMapOvr>
     <a:masterClrMapping/>
   </p:clrMapOvr>
-  <p:transition xmlns:p14="http://schemas.microsoft.com/office/powerpoint/2010/main" p14:dur="400">
-    <p:fade/>
-  </p:transition>
+  <mc:AlternateContent xmlns:mc="http://schemas.openxmlformats.org/markup-compatibility/2006">
+    <mc:Choice xmlns:p14="http://schemas.microsoft.com/office/powerpoint/2010/main" Requires="p14">
+      <p:transition p14:dur="400">
+        <p:fade/>
+      </p:transition>
+    </mc:Choice>
+    <mc:Fallback>
+      <p:transition>
+        <p:fade/>
+      </p:transition>
+    </mc:Fallback>
+  </mc:AlternateContent>
 </p:sld>
 </file>
 
